--- a/src/nlp_proj_adv/presentation/Projet20_NLP_Presentation (2).pptx
+++ b/src/nlp_proj_adv/presentation/Projet20_NLP_Presentation (2).pptx
@@ -4022,10 +4022,18 @@
               </a:spcAft>
             </a:pPr>
             <a:r>
+              <a:rPr lang="fr-FR" altLang="en-US" sz="3200" b="1" dirty="0"/>
+              <a:t>Prédiction de </a:t>
+            </a:r>
+            <a:r>
               <a:rPr lang="en-US" altLang="en-US" sz="3200" b="1" dirty="0"/>
-              <a:t>Analyse de la Cohérence et de la Lisibilité de Texte</a:t>
-            </a:r>
-            <a:endParaRPr lang="en-US" altLang="en-US" sz="3200" b="1" dirty="0"/>
+              <a:t>Lisibilité de Texte</a:t>
+            </a:r>
+            <a:r>
+              <a:rPr lang="fr-FR" altLang="en-US" sz="3200" b="1" dirty="0"/>
+              <a:t> et Analyse de Coherence</a:t>
+            </a:r>
+            <a:endParaRPr lang="fr-FR" altLang="en-US" sz="3200" b="1" dirty="0"/>
           </a:p>
         </p:txBody>
       </p:sp>
